--- a/public/cografya/9-sinif/unite-1/GNL-COG9-SN-U1_Unite_Sonu_Olcme_ve_Degerlendirme_v1.0.pptx
+++ b/public/cografya/9-sinif/unite-1/GNL-COG9-SN-U1_Unite_Sonu_Olcme_ve_Degerlendirme_v1.0.pptx
@@ -5,14 +5,14 @@
     <p:sldMasterId id="2147483648" r:id="rId1"/>
   </p:sldMasterIdLst>
   <p:sldIdLst>
-    <p:sldId id="378" r:id="rId130"/>
-    <p:sldId id="379" r:id="rId131"/>
-    <p:sldId id="380" r:id="rId132"/>
-    <p:sldId id="381" r:id="rId133"/>
-    <p:sldId id="382" r:id="rId134"/>
     <p:sldId id="383" r:id="rId135"/>
     <p:sldId id="384" r:id="rId136"/>
-    <p:sldId id="385" r:id="rId15"/>
+    <p:sldId id="385" r:id="rId137"/>
+    <p:sldId id="386" r:id="rId138"/>
+    <p:sldId id="387" r:id="rId139"/>
+    <p:sldId id="388" r:id="rId140"/>
+    <p:sldId id="389" r:id="rId141"/>
+    <p:sldId id="390" r:id="rId15"/>
   </p:sldIdLst>
   <p:sldSz cx="12191695" cy="6858000" type="screen4x3"/>
   <p:notesSz cx="6858000" cy="9144000"/>
@@ -464,428 +464,6 @@
 </p:notesMaster>
 </file>
 
-<file path=ppt/notesSlides/notesSlide123.xml><?xml version="1.0" encoding="utf-8"?>
-<p:notes xmlns:a="http://schemas.openxmlformats.org/drawingml/2006/main" xmlns:p="http://schemas.openxmlformats.org/presentationml/2006/main" xmlns:r="http://schemas.openxmlformats.org/officeDocument/2006/relationships">
-  <p:cSld>
-    <p:spTree>
-      <p:nvGrpSpPr>
-        <p:cNvPr id="1" name=""/>
-        <p:cNvGrpSpPr/>
-        <p:nvPr/>
-      </p:nvGrpSpPr>
-      <p:grpSpPr>
-        <a:xfrm>
-          <a:off x="0" y="0"/>
-          <a:ext cx="0" cy="0"/>
-          <a:chOff x="0" y="0"/>
-          <a:chExt cx="0" cy="0"/>
-        </a:xfrm>
-      </p:grpSpPr>
-      <p:sp>
-        <p:nvSpPr>
-          <p:cNvPr id="2" name="Slide Image Placeholder 1"/>
-          <p:cNvSpPr>
-            <a:spLocks noGrp="1"/>
-          </p:cNvSpPr>
-          <p:nvPr>
-            <p:ph type="sldImg" idx="2"/>
-          </p:nvPr>
-        </p:nvSpPr>
-        <p:spPr/>
-      </p:sp>
-      <p:sp>
-        <p:nvSpPr>
-          <p:cNvPr id="3" name="Notes Placeholder 2"/>
-          <p:cNvSpPr>
-            <a:spLocks noGrp="1"/>
-          </p:cNvSpPr>
-          <p:nvPr>
-            <p:ph type="body" idx="3" sz="quarter"/>
-          </p:nvPr>
-        </p:nvSpPr>
-        <p:spPr/>
-        <p:txBody>
-          <a:bodyPr/>
-          <a:lstStyle/>
-          <a:p>
-            <a:r>
-              <a:t>AMAÇ: Kitabın ünite ölçme sorularından 1. soru (sıralama) ve 2. soru (gerekçe).</a:t>
-            </a:r>
-          </a:p>
-          <a:p/>
-          <a:p>
-            <a:r>
-              <a:t>NASIL: Ev çalışmasıdır; 4. haftanın başında ya da ödev kontrolünde kullanın.</a:t>
-            </a:r>
-          </a:p>
-          <a:p/>
-          <a:p>
-            <a:r>
-              <a:t>KAYNAK: Kitap s. 29 (bilgiler, soru ve seçenekler birebir).</a:t>
-            </a:r>
-          </a:p>
-        </p:txBody>
-      </p:sp>
-      <p:sp>
-        <p:nvSpPr>
-          <p:cNvPr id="4" name="Slide Number Placeholder 3"/>
-          <p:cNvSpPr>
-            <a:spLocks noGrp="1"/>
-          </p:cNvSpPr>
-          <p:nvPr>
-            <p:ph type="sldNum" idx="5" sz="quarter"/>
-          </p:nvPr>
-        </p:nvSpPr>
-        <p:spPr/>
-      </p:sp>
-    </p:spTree>
-  </p:cSld>
-  <p:clrMapOvr>
-    <a:masterClrMapping/>
-  </p:clrMapOvr>
-</p:notes>
-</file>
-
-<file path=ppt/notesSlides/notesSlide124.xml><?xml version="1.0" encoding="utf-8"?>
-<p:notes xmlns:a="http://schemas.openxmlformats.org/drawingml/2006/main" xmlns:p="http://schemas.openxmlformats.org/presentationml/2006/main" xmlns:r="http://schemas.openxmlformats.org/officeDocument/2006/relationships">
-  <p:cSld>
-    <p:spTree>
-      <p:nvGrpSpPr>
-        <p:cNvPr id="1" name=""/>
-        <p:cNvGrpSpPr/>
-        <p:nvPr/>
-      </p:nvGrpSpPr>
-      <p:grpSpPr>
-        <a:xfrm>
-          <a:off x="0" y="0"/>
-          <a:ext cx="0" cy="0"/>
-          <a:chOff x="0" y="0"/>
-          <a:chExt cx="0" cy="0"/>
-        </a:xfrm>
-      </p:grpSpPr>
-      <p:sp>
-        <p:nvSpPr>
-          <p:cNvPr id="2" name="Slide Image Placeholder 1"/>
-          <p:cNvSpPr>
-            <a:spLocks noGrp="1"/>
-          </p:cNvSpPr>
-          <p:nvPr>
-            <p:ph type="sldImg" idx="2"/>
-          </p:nvPr>
-        </p:nvSpPr>
-        <p:spPr/>
-      </p:sp>
-      <p:sp>
-        <p:nvSpPr>
-          <p:cNvPr id="3" name="Notes Placeholder 2"/>
-          <p:cNvSpPr>
-            <a:spLocks noGrp="1"/>
-          </p:cNvSpPr>
-          <p:nvPr>
-            <p:ph type="body" idx="3" sz="quarter"/>
-          </p:nvPr>
-        </p:nvSpPr>
-        <p:spPr/>
-        <p:txBody>
-          <a:bodyPr/>
-          <a:lstStyle/>
-          <a:p>
-            <a:r>
-              <a:t>AMAÇ: Doğru sıralama ve gerekçesi.</a:t>
-            </a:r>
-          </a:p>
-          <a:p/>
-          <a:p>
-            <a:r>
-              <a:t>BEKLENEN CEVAP: D) III, IV, I, II. Gerekçe: III Eski Çağ (yazının icadı), IV Orta Çağ (İpek ve Baharat Yolu), I Yeni Çağ (keşifler ve matbaa), II Yakın Çağ (Fransız İhtilali ve Sanayi Devrimi).</a:t>
-            </a:r>
-          </a:p>
-          <a:p/>
-          <a:p>
-            <a:r>
-              <a:t>KAYNAK: Kitap s. 24 (çağların etkenleri) ve s. 29.</a:t>
-            </a:r>
-          </a:p>
-        </p:txBody>
-      </p:sp>
-      <p:sp>
-        <p:nvSpPr>
-          <p:cNvPr id="4" name="Slide Number Placeholder 3"/>
-          <p:cNvSpPr>
-            <a:spLocks noGrp="1"/>
-          </p:cNvSpPr>
-          <p:nvPr>
-            <p:ph type="sldNum" idx="5" sz="quarter"/>
-          </p:nvPr>
-        </p:nvSpPr>
-        <p:spPr/>
-      </p:sp>
-    </p:spTree>
-  </p:cSld>
-  <p:clrMapOvr>
-    <a:masterClrMapping/>
-  </p:clrMapOvr>
-</p:notes>
-</file>
-
-<file path=ppt/notesSlides/notesSlide125.xml><?xml version="1.0" encoding="utf-8"?>
-<p:notes xmlns:a="http://schemas.openxmlformats.org/drawingml/2006/main" xmlns:p="http://schemas.openxmlformats.org/presentationml/2006/main" xmlns:r="http://schemas.openxmlformats.org/officeDocument/2006/relationships">
-  <p:cSld>
-    <p:spTree>
-      <p:nvGrpSpPr>
-        <p:cNvPr id="1" name=""/>
-        <p:cNvGrpSpPr/>
-        <p:nvPr/>
-      </p:nvGrpSpPr>
-      <p:grpSpPr>
-        <a:xfrm>
-          <a:off x="0" y="0"/>
-          <a:ext cx="0" cy="0"/>
-          <a:chOff x="0" y="0"/>
-          <a:chExt cx="0" cy="0"/>
-        </a:xfrm>
-      </p:grpSpPr>
-      <p:sp>
-        <p:nvSpPr>
-          <p:cNvPr id="2" name="Slide Image Placeholder 1"/>
-          <p:cNvSpPr>
-            <a:spLocks noGrp="1"/>
-          </p:cNvSpPr>
-          <p:nvPr>
-            <p:ph type="sldImg" idx="2"/>
-          </p:nvPr>
-        </p:nvSpPr>
-        <p:spPr/>
-      </p:sp>
-      <p:sp>
-        <p:nvSpPr>
-          <p:cNvPr id="3" name="Notes Placeholder 2"/>
-          <p:cNvSpPr>
-            <a:spLocks noGrp="1"/>
-          </p:cNvSpPr>
-          <p:nvPr>
-            <p:ph type="body" idx="3" sz="quarter"/>
-          </p:nvPr>
-        </p:nvSpPr>
-        <p:spPr/>
-        <p:txBody>
-          <a:bodyPr/>
-          <a:lstStyle/>
-          <a:p>
-            <a:r>
-              <a:t>AMAÇ: Görseldeki unsur ve olayları doğal-beşerî süreçlerle ve coğrafyanın alt dallarıyla ilişkilendirmek.</a:t>
-            </a:r>
-          </a:p>
-          <a:p/>
-          <a:p>
-            <a:r>
-              <a:t>NASIL: 3. soru tablosu kitapta (s. 30); 4. sorunun eşleştirmeleri sağdaki tablodadır, doğru olanlar işaretlenir. Önce gruplar tartışsın, sonra sınıfça karar verin.</a:t>
-            </a:r>
-          </a:p>
-          <a:p/>
-          <a:p>
-            <a:r>
-              <a:t>BEKLENEN CEVAP: Kitapta cevap anahtarı yoktur; unsurlar görselden okunmuştur. 1 kayalık dağ yamacı → jeomorfoloji (doğru) · 2 tarım alanları → ekonomik coğrafya (doğru: tarım) · 3 yerleşme → yerleşme coğrafyası (doğru) · 4 orman → biyocoğrafya (doğru) · 5 kumsal/plaj (şemsiyeler, turizm) → ekonomik coğrafya (turizm kullanımıyla doğru; kumsalın oluşumu sorulsaydı jeomorfoloji) · 6 marina ve tekneler → ekonomik coğrafya (doğru: turizm) · 7 deniz → jeomorfoloji (YANLIŞ: deniz hidrografyanın konusudur).</a:t>
-            </a:r>
-          </a:p>
-          <a:p/>
-          <a:p>
-            <a:r>
-              <a:t>KAYNAK: Kitap s. 30-31 (görsel, 3. ve 4. soru birebir; eşleştirme tablosu kitaptaki sırayla).</a:t>
-            </a:r>
-          </a:p>
-        </p:txBody>
-      </p:sp>
-      <p:sp>
-        <p:nvSpPr>
-          <p:cNvPr id="4" name="Slide Number Placeholder 3"/>
-          <p:cNvSpPr>
-            <a:spLocks noGrp="1"/>
-          </p:cNvSpPr>
-          <p:nvPr>
-            <p:ph type="sldNum" idx="5" sz="quarter"/>
-          </p:nvPr>
-        </p:nvSpPr>
-        <p:spPr/>
-      </p:sp>
-    </p:spTree>
-  </p:cSld>
-  <p:clrMapOvr>
-    <a:masterClrMapping/>
-  </p:clrMapOvr>
-</p:notes>
-</file>
-
-<file path=ppt/notesSlides/notesSlide126.xml><?xml version="1.0" encoding="utf-8"?>
-<p:notes xmlns:a="http://schemas.openxmlformats.org/drawingml/2006/main" xmlns:p="http://schemas.openxmlformats.org/presentationml/2006/main" xmlns:r="http://schemas.openxmlformats.org/officeDocument/2006/relationships">
-  <p:cSld>
-    <p:spTree>
-      <p:nvGrpSpPr>
-        <p:cNvPr id="1" name=""/>
-        <p:cNvGrpSpPr/>
-        <p:nvPr/>
-      </p:nvGrpSpPr>
-      <p:grpSpPr>
-        <a:xfrm>
-          <a:off x="0" y="0"/>
-          <a:ext cx="0" cy="0"/>
-          <a:chOff x="0" y="0"/>
-          <a:chExt cx="0" cy="0"/>
-        </a:xfrm>
-      </p:grpSpPr>
-      <p:sp>
-        <p:nvSpPr>
-          <p:cNvPr id="2" name="Slide Image Placeholder 1"/>
-          <p:cNvSpPr>
-            <a:spLocks noGrp="1"/>
-          </p:cNvSpPr>
-          <p:nvPr>
-            <p:ph type="sldImg" idx="2"/>
-          </p:nvPr>
-        </p:nvSpPr>
-        <p:spPr/>
-      </p:sp>
-      <p:sp>
-        <p:nvSpPr>
-          <p:cNvPr id="3" name="Notes Placeholder 2"/>
-          <p:cNvSpPr>
-            <a:spLocks noGrp="1"/>
-          </p:cNvSpPr>
-          <p:nvPr>
-            <p:ph type="body" idx="3" sz="quarter"/>
-          </p:nvPr>
-        </p:nvSpPr>
-        <p:spPr/>
-        <p:txBody>
-          <a:bodyPr/>
-          <a:lstStyle/>
-          <a:p>
-            <a:r>
-              <a:t>AMAÇ: 3. sorunun tablosu ve 4. sorunun eşleştirmeleri için örnek cevap.</a:t>
-            </a:r>
-          </a:p>
-          <a:p/>
-          <a:p>
-            <a:r>
-              <a:t>NASIL: Kitapta cevap anahtarı yoktur; unsurlar görselden okunmuştur. 5 numara için tartışma açın: kumsalın oluşumu sorulsa jeomorfoloji, turizmde kullanımı düşünüldüğünde ekonomik coğrafya doğru kabul edilir. 7 numaradaki deniz, su küreyi inceleyen hidrografyanın konusudur.</a:t>
-            </a:r>
-          </a:p>
-          <a:p/>
-          <a:p>
-            <a:r>
-              <a:t>BEKLENEN CEVAP: 4. soruda doğru eşleştirmeler: 1, 2, 3, 4, 5, 6. Yanlış: 7 (jeomorfoloji değil hidrografya).</a:t>
-            </a:r>
-          </a:p>
-          <a:p/>
-          <a:p>
-            <a:r>
-              <a:t>KAYNAK: Kitap s. 30-31 (görsel ve sorular); s. 18-19 (alt dalların inceleme alanları).</a:t>
-            </a:r>
-          </a:p>
-        </p:txBody>
-      </p:sp>
-      <p:sp>
-        <p:nvSpPr>
-          <p:cNvPr id="4" name="Slide Number Placeholder 3"/>
-          <p:cNvSpPr>
-            <a:spLocks noGrp="1"/>
-          </p:cNvSpPr>
-          <p:nvPr>
-            <p:ph type="sldNum" idx="5" sz="quarter"/>
-          </p:nvPr>
-        </p:nvSpPr>
-        <p:spPr/>
-      </p:sp>
-    </p:spTree>
-  </p:cSld>
-  <p:clrMapOvr>
-    <a:masterClrMapping/>
-  </p:clrMapOvr>
-</p:notes>
-</file>
-
-<file path=ppt/notesSlides/notesSlide127.xml><?xml version="1.0" encoding="utf-8"?>
-<p:notes xmlns:a="http://schemas.openxmlformats.org/drawingml/2006/main" xmlns:p="http://schemas.openxmlformats.org/presentationml/2006/main" xmlns:r="http://schemas.openxmlformats.org/officeDocument/2006/relationships">
-  <p:cSld>
-    <p:spTree>
-      <p:nvGrpSpPr>
-        <p:cNvPr id="1" name=""/>
-        <p:cNvGrpSpPr/>
-        <p:nvPr/>
-      </p:nvGrpSpPr>
-      <p:grpSpPr>
-        <a:xfrm>
-          <a:off x="0" y="0"/>
-          <a:ext cx="0" cy="0"/>
-          <a:chOff x="0" y="0"/>
-          <a:chExt cx="0" cy="0"/>
-        </a:xfrm>
-      </p:grpSpPr>
-      <p:sp>
-        <p:nvSpPr>
-          <p:cNvPr id="2" name="Slide Image Placeholder 1"/>
-          <p:cNvSpPr>
-            <a:spLocks noGrp="1"/>
-          </p:cNvSpPr>
-          <p:nvPr>
-            <p:ph type="sldImg" idx="2"/>
-          </p:nvPr>
-        </p:nvSpPr>
-        <p:spPr/>
-      </p:sp>
-      <p:sp>
-        <p:nvSpPr>
-          <p:cNvPr id="3" name="Notes Placeholder 2"/>
-          <p:cNvSpPr>
-            <a:spLocks noGrp="1"/>
-          </p:cNvSpPr>
-          <p:nvPr>
-            <p:ph type="body" idx="3" sz="quarter"/>
-          </p:nvPr>
-        </p:nvSpPr>
-        <p:spPr/>
-        <p:txBody>
-          <a:bodyPr/>
-          <a:lstStyle/>
-          <a:p>
-            <a:r>
-              <a:t>AMAÇ: Beşerî süreçlerin doğal ortamda yol açtığı değişim ve riskleri, coğrafi bakışla tasarlanan arazi kullanımıyla ilişkilendirmek.</a:t>
-            </a:r>
-          </a:p>
-          <a:p/>
-          <a:p>
-            <a:r>
-              <a:t>NASIL: Açık uçlu; deftere yazılır. 7. soruyu 2. haftanın planlama önerileriyle bağlayın.</a:t>
-            </a:r>
-          </a:p>
-          <a:p/>
-          <a:p>
-            <a:r>
-              <a:t>KAYNAK: Kitap s. 31 (5-7. sorular birebir).</a:t>
-            </a:r>
-          </a:p>
-        </p:txBody>
-      </p:sp>
-      <p:sp>
-        <p:nvSpPr>
-          <p:cNvPr id="4" name="Slide Number Placeholder 3"/>
-          <p:cNvSpPr>
-            <a:spLocks noGrp="1"/>
-          </p:cNvSpPr>
-          <p:nvPr>
-            <p:ph type="sldNum" idx="5" sz="quarter"/>
-          </p:nvPr>
-        </p:nvSpPr>
-        <p:spPr/>
-      </p:sp>
-    </p:spTree>
-  </p:cSld>
-  <p:clrMapOvr>
-    <a:masterClrMapping/>
-  </p:clrMapOvr>
-</p:notes>
-</file>
-
 <file path=ppt/notesSlides/notesSlide128.xml><?xml version="1.0" encoding="utf-8"?>
 <p:notes xmlns:a="http://schemas.openxmlformats.org/drawingml/2006/main" xmlns:p="http://schemas.openxmlformats.org/presentationml/2006/main" xmlns:r="http://schemas.openxmlformats.org/officeDocument/2006/relationships">
   <p:cSld>
@@ -931,25 +509,19 @@
           <a:lstStyle/>
           <a:p>
             <a:r>
-              <a:t>AMAÇ: Açık uçlu 5-7. soruların örnek cevapları.</a:t>
+              <a:t>AMAÇ: Kitabın ünite ölçme sorularından 1. soru (sıralama) ve 2. soru (gerekçe).</a:t>
             </a:r>
           </a:p>
           <a:p/>
           <a:p>
             <a:r>
-              <a:t>NASIL: Öğrenci cevabında en az iki değişim (5), iki risk (6) ve gerekçeli bir 'evet' (7) arayın. 7. soruyu 2. haftanın Bozkurt planlama önerileriyle bağlayın.</a:t>
+              <a:t>NASIL: Ev çalışmasıdır; 4. haftanın başında ya da ödev kontrolünde kullanın.</a:t>
             </a:r>
           </a:p>
           <a:p/>
           <a:p>
             <a:r>
-              <a:t>BEKLENEN CEVAP: Kartlardaki maddeler; gerekçeli her cevap kabul edilir.</a:t>
-            </a:r>
-          </a:p>
-          <a:p/>
-          <a:p>
-            <a:r>
-              <a:t>KAYNAK: Kitap s. 30-31 (görsel ve sorular); s. 21 (doğal ortamın sınırlılıkları, insan faaliyetlerinin tehditleri) ve s. 23 (mekânsal planlama).</a:t>
+              <a:t>KAYNAK: Kitap s. 29 (bilgiler, soru ve seçenekler birebir).</a:t>
             </a:r>
           </a:p>
         </p:txBody>
@@ -975,6 +547,434 @@
 </file>
 
 <file path=ppt/notesSlides/notesSlide129.xml><?xml version="1.0" encoding="utf-8"?>
+<p:notes xmlns:a="http://schemas.openxmlformats.org/drawingml/2006/main" xmlns:p="http://schemas.openxmlformats.org/presentationml/2006/main" xmlns:r="http://schemas.openxmlformats.org/officeDocument/2006/relationships">
+  <p:cSld>
+    <p:spTree>
+      <p:nvGrpSpPr>
+        <p:cNvPr id="1" name=""/>
+        <p:cNvGrpSpPr/>
+        <p:nvPr/>
+      </p:nvGrpSpPr>
+      <p:grpSpPr>
+        <a:xfrm>
+          <a:off x="0" y="0"/>
+          <a:ext cx="0" cy="0"/>
+          <a:chOff x="0" y="0"/>
+          <a:chExt cx="0" cy="0"/>
+        </a:xfrm>
+      </p:grpSpPr>
+      <p:sp>
+        <p:nvSpPr>
+          <p:cNvPr id="2" name="Slide Image Placeholder 1"/>
+          <p:cNvSpPr>
+            <a:spLocks noGrp="1"/>
+          </p:cNvSpPr>
+          <p:nvPr>
+            <p:ph type="sldImg" idx="2"/>
+          </p:nvPr>
+        </p:nvSpPr>
+        <p:spPr/>
+      </p:sp>
+      <p:sp>
+        <p:nvSpPr>
+          <p:cNvPr id="3" name="Notes Placeholder 2"/>
+          <p:cNvSpPr>
+            <a:spLocks noGrp="1"/>
+          </p:cNvSpPr>
+          <p:nvPr>
+            <p:ph type="body" idx="3" sz="quarter"/>
+          </p:nvPr>
+        </p:nvSpPr>
+        <p:spPr/>
+        <p:txBody>
+          <a:bodyPr/>
+          <a:lstStyle/>
+          <a:p>
+            <a:r>
+              <a:t>AMAÇ: Doğru sıralama ve gerekçesi.</a:t>
+            </a:r>
+          </a:p>
+          <a:p/>
+          <a:p>
+            <a:r>
+              <a:t>BEKLENEN CEVAP: D) III, IV, I, II. Gerekçe: III Eski Çağ (yazının icadı), IV Orta Çağ (İpek ve Baharat Yolu), I Yeni Çağ (keşifler ve matbaa), II Yakın Çağ (Fransız İhtilali ve Sanayi Devrimi).</a:t>
+            </a:r>
+          </a:p>
+          <a:p/>
+          <a:p>
+            <a:r>
+              <a:t>KAYNAK: Kitap s. 24 (çağların etkenleri) ve s. 29.</a:t>
+            </a:r>
+          </a:p>
+        </p:txBody>
+      </p:sp>
+      <p:sp>
+        <p:nvSpPr>
+          <p:cNvPr id="4" name="Slide Number Placeholder 3"/>
+          <p:cNvSpPr>
+            <a:spLocks noGrp="1"/>
+          </p:cNvSpPr>
+          <p:nvPr>
+            <p:ph type="sldNum" idx="5" sz="quarter"/>
+          </p:nvPr>
+        </p:nvSpPr>
+        <p:spPr/>
+      </p:sp>
+    </p:spTree>
+  </p:cSld>
+  <p:clrMapOvr>
+    <a:masterClrMapping/>
+  </p:clrMapOvr>
+</p:notes>
+</file>
+
+<file path=ppt/notesSlides/notesSlide130.xml><?xml version="1.0" encoding="utf-8"?>
+<p:notes xmlns:a="http://schemas.openxmlformats.org/drawingml/2006/main" xmlns:p="http://schemas.openxmlformats.org/presentationml/2006/main" xmlns:r="http://schemas.openxmlformats.org/officeDocument/2006/relationships">
+  <p:cSld>
+    <p:spTree>
+      <p:nvGrpSpPr>
+        <p:cNvPr id="1" name=""/>
+        <p:cNvGrpSpPr/>
+        <p:nvPr/>
+      </p:nvGrpSpPr>
+      <p:grpSpPr>
+        <a:xfrm>
+          <a:off x="0" y="0"/>
+          <a:ext cx="0" cy="0"/>
+          <a:chOff x="0" y="0"/>
+          <a:chExt cx="0" cy="0"/>
+        </a:xfrm>
+      </p:grpSpPr>
+      <p:sp>
+        <p:nvSpPr>
+          <p:cNvPr id="2" name="Slide Image Placeholder 1"/>
+          <p:cNvSpPr>
+            <a:spLocks noGrp="1"/>
+          </p:cNvSpPr>
+          <p:nvPr>
+            <p:ph type="sldImg" idx="2"/>
+          </p:nvPr>
+        </p:nvSpPr>
+        <p:spPr/>
+      </p:sp>
+      <p:sp>
+        <p:nvSpPr>
+          <p:cNvPr id="3" name="Notes Placeholder 2"/>
+          <p:cNvSpPr>
+            <a:spLocks noGrp="1"/>
+          </p:cNvSpPr>
+          <p:nvPr>
+            <p:ph type="body" idx="3" sz="quarter"/>
+          </p:nvPr>
+        </p:nvSpPr>
+        <p:spPr/>
+        <p:txBody>
+          <a:bodyPr/>
+          <a:lstStyle/>
+          <a:p>
+            <a:r>
+              <a:t>AMAÇ: Görseldeki unsur ve olayları doğal-beşerî süreçlerle ve coğrafyanın alt dallarıyla ilişkilendirmek.</a:t>
+            </a:r>
+          </a:p>
+          <a:p/>
+          <a:p>
+            <a:r>
+              <a:t>NASIL: 3. soru tablosu kitapta (s. 30); 4. sorunun eşleştirmeleri sağdaki tablodadır, doğru olanlar işaretlenir. Önce gruplar tartışsın, sonra sınıfça karar verin.</a:t>
+            </a:r>
+          </a:p>
+          <a:p/>
+          <a:p>
+            <a:r>
+              <a:t>BEKLENEN CEVAP: Kitapta cevap anahtarı yoktur; unsurlar görselden okunmuştur. 1 kayalık dağ yamacı → jeomorfoloji (doğru) · 2 tarım alanları → ekonomik coğrafya (doğru: tarım) · 3 yerleşme → yerleşme coğrafyası (doğru) · 4 orman → biyocoğrafya (doğru) · 5 kumsal/plaj (şemsiyeler, turizm) → ekonomik coğrafya (turizm kullanımıyla doğru; kumsalın oluşumu sorulsaydı jeomorfoloji) · 6 marina ve tekneler → ekonomik coğrafya (doğru: turizm) · 7 deniz → jeomorfoloji (YANLIŞ: deniz hidrografyanın konusudur).</a:t>
+            </a:r>
+          </a:p>
+          <a:p/>
+          <a:p>
+            <a:r>
+              <a:t>KAYNAK: Kitap s. 30-31 (görsel, 3. ve 4. soru birebir; eşleştirme tablosu kitaptaki sırayla).</a:t>
+            </a:r>
+          </a:p>
+        </p:txBody>
+      </p:sp>
+      <p:sp>
+        <p:nvSpPr>
+          <p:cNvPr id="4" name="Slide Number Placeholder 3"/>
+          <p:cNvSpPr>
+            <a:spLocks noGrp="1"/>
+          </p:cNvSpPr>
+          <p:nvPr>
+            <p:ph type="sldNum" idx="5" sz="quarter"/>
+          </p:nvPr>
+        </p:nvSpPr>
+        <p:spPr/>
+      </p:sp>
+    </p:spTree>
+  </p:cSld>
+  <p:clrMapOvr>
+    <a:masterClrMapping/>
+  </p:clrMapOvr>
+</p:notes>
+</file>
+
+<file path=ppt/notesSlides/notesSlide131.xml><?xml version="1.0" encoding="utf-8"?>
+<p:notes xmlns:a="http://schemas.openxmlformats.org/drawingml/2006/main" xmlns:p="http://schemas.openxmlformats.org/presentationml/2006/main" xmlns:r="http://schemas.openxmlformats.org/officeDocument/2006/relationships">
+  <p:cSld>
+    <p:spTree>
+      <p:nvGrpSpPr>
+        <p:cNvPr id="1" name=""/>
+        <p:cNvGrpSpPr/>
+        <p:nvPr/>
+      </p:nvGrpSpPr>
+      <p:grpSpPr>
+        <a:xfrm>
+          <a:off x="0" y="0"/>
+          <a:ext cx="0" cy="0"/>
+          <a:chOff x="0" y="0"/>
+          <a:chExt cx="0" cy="0"/>
+        </a:xfrm>
+      </p:grpSpPr>
+      <p:sp>
+        <p:nvSpPr>
+          <p:cNvPr id="2" name="Slide Image Placeholder 1"/>
+          <p:cNvSpPr>
+            <a:spLocks noGrp="1"/>
+          </p:cNvSpPr>
+          <p:nvPr>
+            <p:ph type="sldImg" idx="2"/>
+          </p:nvPr>
+        </p:nvSpPr>
+        <p:spPr/>
+      </p:sp>
+      <p:sp>
+        <p:nvSpPr>
+          <p:cNvPr id="3" name="Notes Placeholder 2"/>
+          <p:cNvSpPr>
+            <a:spLocks noGrp="1"/>
+          </p:cNvSpPr>
+          <p:nvPr>
+            <p:ph type="body" idx="3" sz="quarter"/>
+          </p:nvPr>
+        </p:nvSpPr>
+        <p:spPr/>
+        <p:txBody>
+          <a:bodyPr/>
+          <a:lstStyle/>
+          <a:p>
+            <a:r>
+              <a:t>AMAÇ: 3. sorunun tablosu ve 4. sorunun eşleştirmeleri için örnek cevap.</a:t>
+            </a:r>
+          </a:p>
+          <a:p/>
+          <a:p>
+            <a:r>
+              <a:t>NASIL: Kitapta cevap anahtarı yoktur; unsurlar görselden okunmuştur. 5 numara için tartışma açın: kumsalın oluşumu sorulsa jeomorfoloji, turizmde kullanımı düşünüldüğünde ekonomik coğrafya doğru kabul edilir. 7 numaradaki deniz, su küreyi inceleyen hidrografyanın konusudur.</a:t>
+            </a:r>
+          </a:p>
+          <a:p/>
+          <a:p>
+            <a:r>
+              <a:t>BEKLENEN CEVAP: 4. soruda doğru eşleştirmeler: 1, 2, 3, 4, 5, 6. Yanlış: 7 (jeomorfoloji değil hidrografya).</a:t>
+            </a:r>
+          </a:p>
+          <a:p/>
+          <a:p>
+            <a:r>
+              <a:t>KAYNAK: Kitap s. 30-31 (görsel ve sorular); s. 18-19 (alt dalların inceleme alanları).</a:t>
+            </a:r>
+          </a:p>
+        </p:txBody>
+      </p:sp>
+      <p:sp>
+        <p:nvSpPr>
+          <p:cNvPr id="4" name="Slide Number Placeholder 3"/>
+          <p:cNvSpPr>
+            <a:spLocks noGrp="1"/>
+          </p:cNvSpPr>
+          <p:nvPr>
+            <p:ph type="sldNum" idx="5" sz="quarter"/>
+          </p:nvPr>
+        </p:nvSpPr>
+        <p:spPr/>
+      </p:sp>
+    </p:spTree>
+  </p:cSld>
+  <p:clrMapOvr>
+    <a:masterClrMapping/>
+  </p:clrMapOvr>
+</p:notes>
+</file>
+
+<file path=ppt/notesSlides/notesSlide132.xml><?xml version="1.0" encoding="utf-8"?>
+<p:notes xmlns:a="http://schemas.openxmlformats.org/drawingml/2006/main" xmlns:p="http://schemas.openxmlformats.org/presentationml/2006/main" xmlns:r="http://schemas.openxmlformats.org/officeDocument/2006/relationships">
+  <p:cSld>
+    <p:spTree>
+      <p:nvGrpSpPr>
+        <p:cNvPr id="1" name=""/>
+        <p:cNvGrpSpPr/>
+        <p:nvPr/>
+      </p:nvGrpSpPr>
+      <p:grpSpPr>
+        <a:xfrm>
+          <a:off x="0" y="0"/>
+          <a:ext cx="0" cy="0"/>
+          <a:chOff x="0" y="0"/>
+          <a:chExt cx="0" cy="0"/>
+        </a:xfrm>
+      </p:grpSpPr>
+      <p:sp>
+        <p:nvSpPr>
+          <p:cNvPr id="2" name="Slide Image Placeholder 1"/>
+          <p:cNvSpPr>
+            <a:spLocks noGrp="1"/>
+          </p:cNvSpPr>
+          <p:nvPr>
+            <p:ph type="sldImg" idx="2"/>
+          </p:nvPr>
+        </p:nvSpPr>
+        <p:spPr/>
+      </p:sp>
+      <p:sp>
+        <p:nvSpPr>
+          <p:cNvPr id="3" name="Notes Placeholder 2"/>
+          <p:cNvSpPr>
+            <a:spLocks noGrp="1"/>
+          </p:cNvSpPr>
+          <p:nvPr>
+            <p:ph type="body" idx="3" sz="quarter"/>
+          </p:nvPr>
+        </p:nvSpPr>
+        <p:spPr/>
+        <p:txBody>
+          <a:bodyPr/>
+          <a:lstStyle/>
+          <a:p>
+            <a:r>
+              <a:t>AMAÇ: Beşerî süreçlerin doğal ortamda yol açtığı değişim ve riskleri, coğrafi bakışla tasarlanan arazi kullanımıyla ilişkilendirmek.</a:t>
+            </a:r>
+          </a:p>
+          <a:p/>
+          <a:p>
+            <a:r>
+              <a:t>NASIL: Açık uçlu; deftere yazılır. 7. soruyu 2. haftanın planlama önerileriyle bağlayın.</a:t>
+            </a:r>
+          </a:p>
+          <a:p/>
+          <a:p>
+            <a:r>
+              <a:t>KAYNAK: Kitap s. 31 (5-7. sorular birebir).</a:t>
+            </a:r>
+          </a:p>
+        </p:txBody>
+      </p:sp>
+      <p:sp>
+        <p:nvSpPr>
+          <p:cNvPr id="4" name="Slide Number Placeholder 3"/>
+          <p:cNvSpPr>
+            <a:spLocks noGrp="1"/>
+          </p:cNvSpPr>
+          <p:nvPr>
+            <p:ph type="sldNum" idx="5" sz="quarter"/>
+          </p:nvPr>
+        </p:nvSpPr>
+        <p:spPr/>
+      </p:sp>
+    </p:spTree>
+  </p:cSld>
+  <p:clrMapOvr>
+    <a:masterClrMapping/>
+  </p:clrMapOvr>
+</p:notes>
+</file>
+
+<file path=ppt/notesSlides/notesSlide133.xml><?xml version="1.0" encoding="utf-8"?>
+<p:notes xmlns:a="http://schemas.openxmlformats.org/drawingml/2006/main" xmlns:p="http://schemas.openxmlformats.org/presentationml/2006/main" xmlns:r="http://schemas.openxmlformats.org/officeDocument/2006/relationships">
+  <p:cSld>
+    <p:spTree>
+      <p:nvGrpSpPr>
+        <p:cNvPr id="1" name=""/>
+        <p:cNvGrpSpPr/>
+        <p:nvPr/>
+      </p:nvGrpSpPr>
+      <p:grpSpPr>
+        <a:xfrm>
+          <a:off x="0" y="0"/>
+          <a:ext cx="0" cy="0"/>
+          <a:chOff x="0" y="0"/>
+          <a:chExt cx="0" cy="0"/>
+        </a:xfrm>
+      </p:grpSpPr>
+      <p:sp>
+        <p:nvSpPr>
+          <p:cNvPr id="2" name="Slide Image Placeholder 1"/>
+          <p:cNvSpPr>
+            <a:spLocks noGrp="1"/>
+          </p:cNvSpPr>
+          <p:nvPr>
+            <p:ph type="sldImg" idx="2"/>
+          </p:nvPr>
+        </p:nvSpPr>
+        <p:spPr/>
+      </p:sp>
+      <p:sp>
+        <p:nvSpPr>
+          <p:cNvPr id="3" name="Notes Placeholder 2"/>
+          <p:cNvSpPr>
+            <a:spLocks noGrp="1"/>
+          </p:cNvSpPr>
+          <p:nvPr>
+            <p:ph type="body" idx="3" sz="quarter"/>
+          </p:nvPr>
+        </p:nvSpPr>
+        <p:spPr/>
+        <p:txBody>
+          <a:bodyPr/>
+          <a:lstStyle/>
+          <a:p>
+            <a:r>
+              <a:t>AMAÇ: Açık uçlu 5-7. soruların örnek cevapları.</a:t>
+            </a:r>
+          </a:p>
+          <a:p/>
+          <a:p>
+            <a:r>
+              <a:t>NASIL: Öğrenci cevabında en az iki değişim (5), iki risk (6) ve gerekçeli bir 'evet' (7) arayın. 7. soruyu 2. haftanın Bozkurt planlama önerileriyle bağlayın.</a:t>
+            </a:r>
+          </a:p>
+          <a:p/>
+          <a:p>
+            <a:r>
+              <a:t>BEKLENEN CEVAP: Kartlardaki maddeler; gerekçeli her cevap kabul edilir.</a:t>
+            </a:r>
+          </a:p>
+          <a:p/>
+          <a:p>
+            <a:r>
+              <a:t>KAYNAK: Kitap s. 30-31 (görsel ve sorular); s. 21 (doğal ortamın sınırlılıkları, insan faaliyetlerinin tehditleri) ve s. 23 (mekânsal planlama).</a:t>
+            </a:r>
+          </a:p>
+        </p:txBody>
+      </p:sp>
+      <p:sp>
+        <p:nvSpPr>
+          <p:cNvPr id="4" name="Slide Number Placeholder 3"/>
+          <p:cNvSpPr>
+            <a:spLocks noGrp="1"/>
+          </p:cNvSpPr>
+          <p:nvPr>
+            <p:ph type="sldNum" idx="5" sz="quarter"/>
+          </p:nvPr>
+        </p:nvSpPr>
+        <p:spPr/>
+      </p:sp>
+    </p:spTree>
+  </p:cSld>
+  <p:clrMapOvr>
+    <a:masterClrMapping/>
+  </p:clrMapOvr>
+</p:notes>
+</file>
+
+<file path=ppt/notesSlides/notesSlide134.xml><?xml version="1.0" encoding="utf-8"?>
 <p:notes xmlns:a="http://schemas.openxmlformats.org/drawingml/2006/main" xmlns:p="http://schemas.openxmlformats.org/presentationml/2006/main" xmlns:r="http://schemas.openxmlformats.org/officeDocument/2006/relationships">
   <p:cSld>
     <p:spTree>
@@ -5424,7 +5424,7 @@
                 </a:solidFill>
                 <a:latin typeface="Calibri"/>
               </a:rPr>
-              <a:t>123 / 129</a:t>
+              <a:t>128 / 134</a:t>
             </a:r>
           </a:p>
         </p:txBody>
@@ -6783,7 +6783,7 @@
                 </a:solidFill>
                 <a:latin typeface="Calibri"/>
               </a:rPr>
-              <a:t>124 / 129</a:t>
+              <a:t>129 / 134</a:t>
             </a:r>
           </a:p>
         </p:txBody>
@@ -8010,7 +8010,7 @@
                 </a:solidFill>
                 <a:latin typeface="Calibri"/>
               </a:rPr>
-              <a:t>125 / 129</a:t>
+              <a:t>130 / 134</a:t>
             </a:r>
           </a:p>
         </p:txBody>
@@ -9605,7 +9605,7 @@
                 </a:solidFill>
                 <a:latin typeface="Calibri"/>
               </a:rPr>
-              <a:t>126 / 129</a:t>
+              <a:t>131 / 134</a:t>
             </a:r>
           </a:p>
         </p:txBody>
@@ -10271,7 +10271,7 @@
                 </a:solidFill>
                 <a:latin typeface="Calibri"/>
               </a:rPr>
-              <a:t>127 / 129</a:t>
+              <a:t>132 / 134</a:t>
             </a:r>
           </a:p>
         </p:txBody>
@@ -11366,7 +11366,7 @@
                 </a:solidFill>
                 <a:latin typeface="Calibri"/>
               </a:rPr>
-              <a:t>128 / 129</a:t>
+              <a:t>133 / 134</a:t>
             </a:r>
           </a:p>
         </p:txBody>
@@ -12170,7 +12170,7 @@
                 </a:solidFill>
                 <a:latin typeface="Calibri"/>
               </a:rPr>
-              <a:t>129 / 129</a:t>
+              <a:t>134 / 134</a:t>
             </a:r>
           </a:p>
         </p:txBody>
@@ -12615,7 +12615,7 @@
                 </a:solidFill>
                 <a:latin typeface="Calibri"/>
               </a:rPr>
-              <a:t>okulapp.org/cografya · sürüm 2026.10</a:t>
+              <a:t>okulapp.org/cografya · sürüm 2026.10.1</a:t>
             </a:r>
           </a:p>
         </p:txBody>
